--- a/generated/Tier 1 Broker Scorecards/Kavi.Llc_Broker_Scorecard.pptx
+++ b/generated/Tier 1 Broker Scorecards/Kavi.Llc_Broker_Scorecard.pptx
@@ -3394,7 +3394,7 @@
                         <a:rPr sz="900">
                           <a:latin typeface="Segoe UI"/>
                         </a:rPr>
-                        <a:t>Tier 1  |  17.07% / 15.00%</a:t>
+                        <a:t>Tier 1  |  14.63% / 15.00%</a:t>
                       </a:r>
                     </a:p>
                   </a:txBody>
@@ -3690,7 +3690,7 @@
                         <a:rPr sz="900">
                           <a:latin typeface="Segoe UI"/>
                         </a:rPr>
-                        <a:t>Fleet Bound Premium: $25,888.18</a:t>
+                        <a:t>Fleet Bound Premium: $29,300.18</a:t>
                       </a:r>
                     </a:p>
                   </a:txBody>
@@ -3727,7 +3727,7 @@
                         <a:rPr sz="900">
                           <a:latin typeface="Segoe UI"/>
                         </a:rPr>
-                        <a:t>Fleet Book %: 21.9%</a:t>
+                        <a:t>Fleet Book %: 24.8%</a:t>
                       </a:r>
                     </a:p>
                   </a:txBody>
@@ -3766,7 +3766,7 @@
                         <a:rPr sz="900">
                           <a:latin typeface="Segoe UI"/>
                         </a:rPr>
-                        <a:t>Non-Fleet Subs: 39  |  Binds: 6</a:t>
+                        <a:t>Non-Fleet Subs: 39  |  Binds: 5</a:t>
                       </a:r>
                     </a:p>
                   </a:txBody>
@@ -3803,7 +3803,7 @@
                         <a:rPr sz="900">
                           <a:latin typeface="Segoe UI"/>
                         </a:rPr>
-                        <a:t>Non-Fleet Bound Premium: $92,386.36</a:t>
+                        <a:t>Non-Fleet Bound Premium: $88,974.36</a:t>
                       </a:r>
                     </a:p>
                   </a:txBody>
@@ -3840,7 +3840,7 @@
                         <a:rPr sz="900">
                           <a:latin typeface="Segoe UI"/>
                         </a:rPr>
-                        <a:t>Non-Fleet Book %: 78.1%</a:t>
+                        <a:t>Non-Fleet Book %: 75.2%</a:t>
                       </a:r>
                     </a:p>
                   </a:txBody>
@@ -4738,7 +4738,7 @@
                         <a:rPr sz="800">
                           <a:latin typeface="Segoe UI"/>
                         </a:rPr>
-                        <a:t>41.4%</a:t>
+                        <a:t>44.8%</a:t>
                       </a:r>
                     </a:p>
                   </a:txBody>
@@ -5005,7 +5005,7 @@
                         <a:rPr sz="800">
                           <a:latin typeface="Segoe UI"/>
                         </a:rPr>
-                        <a:t>12</a:t>
+                        <a:t>13</a:t>
                       </a:r>
                     </a:p>
                   </a:txBody>

--- a/generated/Tier 1 Broker Scorecards/Kavi.Llc_Broker_Scorecard.pptx
+++ b/generated/Tier 1 Broker Scorecards/Kavi.Llc_Broker_Scorecard.pptx
@@ -3394,7 +3394,7 @@
                         <a:rPr sz="900">
                           <a:latin typeface="Segoe UI"/>
                         </a:rPr>
-                        <a:t>Tier 1  |  14.63% / 15.00%</a:t>
+                        <a:t>Tier 1  |  17.07% / 15.00%</a:t>
                       </a:r>
                     </a:p>
                   </a:txBody>
@@ -3690,7 +3690,7 @@
                         <a:rPr sz="900">
                           <a:latin typeface="Segoe UI"/>
                         </a:rPr>
-                        <a:t>Fleet Bound Premium: $29,300.18</a:t>
+                        <a:t>Fleet Bound Premium: $25,888.18</a:t>
                       </a:r>
                     </a:p>
                   </a:txBody>
@@ -3727,7 +3727,7 @@
                         <a:rPr sz="900">
                           <a:latin typeface="Segoe UI"/>
                         </a:rPr>
-                        <a:t>Fleet Book %: 24.8%</a:t>
+                        <a:t>Fleet Book %: 21.9%</a:t>
                       </a:r>
                     </a:p>
                   </a:txBody>
@@ -3766,7 +3766,7 @@
                         <a:rPr sz="900">
                           <a:latin typeface="Segoe UI"/>
                         </a:rPr>
-                        <a:t>Non-Fleet Subs: 39  |  Binds: 5</a:t>
+                        <a:t>Non-Fleet Subs: 39  |  Binds: 6</a:t>
                       </a:r>
                     </a:p>
                   </a:txBody>
@@ -3803,7 +3803,7 @@
                         <a:rPr sz="900">
                           <a:latin typeface="Segoe UI"/>
                         </a:rPr>
-                        <a:t>Non-Fleet Bound Premium: $88,974.36</a:t>
+                        <a:t>Non-Fleet Bound Premium: $92,386.36</a:t>
                       </a:r>
                     </a:p>
                   </a:txBody>
@@ -3840,7 +3840,7 @@
                         <a:rPr sz="900">
                           <a:latin typeface="Segoe UI"/>
                         </a:rPr>
-                        <a:t>Non-Fleet Book %: 75.2%</a:t>
+                        <a:t>Non-Fleet Book %: 78.1%</a:t>
                       </a:r>
                     </a:p>
                   </a:txBody>
@@ -4578,7 +4578,7 @@
                         <a:rPr sz="800">
                           <a:latin typeface="Segoe UI"/>
                         </a:rPr>
-                        <a:t>35.5%</a:t>
+                        <a:t>41.9%</a:t>
                       </a:r>
                     </a:p>
                   </a:txBody>
@@ -4738,7 +4738,7 @@
                         <a:rPr sz="800">
                           <a:latin typeface="Segoe UI"/>
                         </a:rPr>
-                        <a:t>44.8%</a:t>
+                        <a:t>41.4%</a:t>
                       </a:r>
                     </a:p>
                   </a:txBody>
@@ -4857,7 +4857,7 @@
                         <a:rPr sz="800">
                           <a:latin typeface="Segoe UI"/>
                         </a:rPr>
-                        <a:t>11</a:t>
+                        <a:t>13</a:t>
                       </a:r>
                     </a:p>
                   </a:txBody>
@@ -5005,7 +5005,7 @@
                         <a:rPr sz="800">
                           <a:latin typeface="Segoe UI"/>
                         </a:rPr>
-                        <a:t>13</a:t>
+                        <a:t>12</a:t>
                       </a:r>
                     </a:p>
                   </a:txBody>

--- a/generated/Tier 1 Broker Scorecards/Kavi.Llc_Broker_Scorecard.pptx
+++ b/generated/Tier 1 Broker Scorecards/Kavi.Llc_Broker_Scorecard.pptx
@@ -3394,7 +3394,7 @@
                         <a:rPr sz="900">
                           <a:latin typeface="Segoe UI"/>
                         </a:rPr>
-                        <a:t>Tier 1  |  17.07% / 15.00%</a:t>
+                        <a:t>Tier 1  |  14.63% / 15.00%</a:t>
                       </a:r>
                     </a:p>
                   </a:txBody>
@@ -3690,7 +3690,7 @@
                         <a:rPr sz="900">
                           <a:latin typeface="Segoe UI"/>
                         </a:rPr>
-                        <a:t>Fleet Bound Premium: $25,888.18</a:t>
+                        <a:t>Fleet Bound Premium: $29,300.18</a:t>
                       </a:r>
                     </a:p>
                   </a:txBody>
@@ -3727,7 +3727,7 @@
                         <a:rPr sz="900">
                           <a:latin typeface="Segoe UI"/>
                         </a:rPr>
-                        <a:t>Fleet Book %: 21.9%</a:t>
+                        <a:t>Fleet Book %: 24.8%</a:t>
                       </a:r>
                     </a:p>
                   </a:txBody>
@@ -3766,7 +3766,7 @@
                         <a:rPr sz="900">
                           <a:latin typeface="Segoe UI"/>
                         </a:rPr>
-                        <a:t>Non-Fleet Subs: 39  |  Binds: 6</a:t>
+                        <a:t>Non-Fleet Subs: 39  |  Binds: 5</a:t>
                       </a:r>
                     </a:p>
                   </a:txBody>
@@ -3803,7 +3803,7 @@
                         <a:rPr sz="900">
                           <a:latin typeface="Segoe UI"/>
                         </a:rPr>
-                        <a:t>Non-Fleet Bound Premium: $92,386.36</a:t>
+                        <a:t>Non-Fleet Bound Premium: $88,974.36</a:t>
                       </a:r>
                     </a:p>
                   </a:txBody>
@@ -3840,7 +3840,7 @@
                         <a:rPr sz="900">
                           <a:latin typeface="Segoe UI"/>
                         </a:rPr>
-                        <a:t>Non-Fleet Book %: 78.1%</a:t>
+                        <a:t>Non-Fleet Book %: 75.2%</a:t>
                       </a:r>
                     </a:p>
                   </a:txBody>
@@ -4578,7 +4578,7 @@
                         <a:rPr sz="800">
                           <a:latin typeface="Segoe UI"/>
                         </a:rPr>
-                        <a:t>41.9%</a:t>
+                        <a:t>38.7%</a:t>
                       </a:r>
                     </a:p>
                   </a:txBody>
@@ -4738,7 +4738,7 @@
                         <a:rPr sz="800">
                           <a:latin typeface="Segoe UI"/>
                         </a:rPr>
-                        <a:t>41.4%</a:t>
+                        <a:t>44.8%</a:t>
                       </a:r>
                     </a:p>
                   </a:txBody>
@@ -4857,7 +4857,7 @@
                         <a:rPr sz="800">
                           <a:latin typeface="Segoe UI"/>
                         </a:rPr>
-                        <a:t>13</a:t>
+                        <a:t>12</a:t>
                       </a:r>
                     </a:p>
                   </a:txBody>
@@ -5005,7 +5005,7 @@
                         <a:rPr sz="800">
                           <a:latin typeface="Segoe UI"/>
                         </a:rPr>
-                        <a:t>12</a:t>
+                        <a:t>13</a:t>
                       </a:r>
                     </a:p>
                   </a:txBody>

--- a/generated/Tier 1 Broker Scorecards/Kavi.Llc_Broker_Scorecard.pptx
+++ b/generated/Tier 1 Broker Scorecards/Kavi.Llc_Broker_Scorecard.pptx
@@ -4578,7 +4578,7 @@
                         <a:rPr sz="800">
                           <a:latin typeface="Segoe UI"/>
                         </a:rPr>
-                        <a:t>38.7%</a:t>
+                        <a:t>41.9%</a:t>
                       </a:r>
                     </a:p>
                   </a:txBody>
@@ -4738,7 +4738,7 @@
                         <a:rPr sz="800">
                           <a:latin typeface="Segoe UI"/>
                         </a:rPr>
-                        <a:t>44.8%</a:t>
+                        <a:t>41.4%</a:t>
                       </a:r>
                     </a:p>
                   </a:txBody>
@@ -4857,7 +4857,7 @@
                         <a:rPr sz="800">
                           <a:latin typeface="Segoe UI"/>
                         </a:rPr>
-                        <a:t>12</a:t>
+                        <a:t>13</a:t>
                       </a:r>
                     </a:p>
                   </a:txBody>
@@ -5005,7 +5005,7 @@
                         <a:rPr sz="800">
                           <a:latin typeface="Segoe UI"/>
                         </a:rPr>
-                        <a:t>13</a:t>
+                        <a:t>12</a:t>
                       </a:r>
                     </a:p>
                   </a:txBody>

--- a/generated/Tier 1 Broker Scorecards/Kavi.Llc_Broker_Scorecard.pptx
+++ b/generated/Tier 1 Broker Scorecards/Kavi.Llc_Broker_Scorecard.pptx
@@ -4738,7 +4738,7 @@
                         <a:rPr sz="800">
                           <a:latin typeface="Segoe UI"/>
                         </a:rPr>
-                        <a:t>41.4%</a:t>
+                        <a:t>44.8%</a:t>
                       </a:r>
                     </a:p>
                   </a:txBody>
@@ -5005,7 +5005,7 @@
                         <a:rPr sz="800">
                           <a:latin typeface="Segoe UI"/>
                         </a:rPr>
-                        <a:t>12</a:t>
+                        <a:t>13</a:t>
                       </a:r>
                     </a:p>
                   </a:txBody>

--- a/generated/Tier 1 Broker Scorecards/Kavi.Llc_Broker_Scorecard.pptx
+++ b/generated/Tier 1 Broker Scorecards/Kavi.Llc_Broker_Scorecard.pptx
@@ -4578,7 +4578,7 @@
                         <a:rPr sz="800">
                           <a:latin typeface="Segoe UI"/>
                         </a:rPr>
-                        <a:t>41.9%</a:t>
+                        <a:t>38.7%</a:t>
                       </a:r>
                     </a:p>
                   </a:txBody>
@@ -4738,7 +4738,7 @@
                         <a:rPr sz="800">
                           <a:latin typeface="Segoe UI"/>
                         </a:rPr>
-                        <a:t>44.8%</a:t>
+                        <a:t>41.4%</a:t>
                       </a:r>
                     </a:p>
                   </a:txBody>
@@ -4857,7 +4857,7 @@
                         <a:rPr sz="800">
                           <a:latin typeface="Segoe UI"/>
                         </a:rPr>
-                        <a:t>13</a:t>
+                        <a:t>12</a:t>
                       </a:r>
                     </a:p>
                   </a:txBody>
@@ -5005,7 +5005,7 @@
                         <a:rPr sz="800">
                           <a:latin typeface="Segoe UI"/>
                         </a:rPr>
-                        <a:t>13</a:t>
+                        <a:t>12</a:t>
                       </a:r>
                     </a:p>
                   </a:txBody>

--- a/generated/Tier 1 Broker Scorecards/Kavi.Llc_Broker_Scorecard.pptx
+++ b/generated/Tier 1 Broker Scorecards/Kavi.Llc_Broker_Scorecard.pptx
@@ -4578,7 +4578,7 @@
                         <a:rPr sz="800">
                           <a:latin typeface="Segoe UI"/>
                         </a:rPr>
-                        <a:t>38.7%</a:t>
+                        <a:t>35.5%</a:t>
                       </a:r>
                     </a:p>
                   </a:txBody>
@@ -4738,7 +4738,7 @@
                         <a:rPr sz="800">
                           <a:latin typeface="Segoe UI"/>
                         </a:rPr>
-                        <a:t>41.4%</a:t>
+                        <a:t>44.8%</a:t>
                       </a:r>
                     </a:p>
                   </a:txBody>
@@ -4857,7 +4857,7 @@
                         <a:rPr sz="800">
                           <a:latin typeface="Segoe UI"/>
                         </a:rPr>
-                        <a:t>12</a:t>
+                        <a:t>11</a:t>
                       </a:r>
                     </a:p>
                   </a:txBody>
@@ -5005,7 +5005,7 @@
                         <a:rPr sz="800">
                           <a:latin typeface="Segoe UI"/>
                         </a:rPr>
-                        <a:t>12</a:t>
+                        <a:t>13</a:t>
                       </a:r>
                     </a:p>
                   </a:txBody>

--- a/generated/Tier 1 Broker Scorecards/Kavi.Llc_Broker_Scorecard.pptx
+++ b/generated/Tier 1 Broker Scorecards/Kavi.Llc_Broker_Scorecard.pptx
@@ -3394,7 +3394,7 @@
                         <a:rPr sz="900">
                           <a:latin typeface="Segoe UI"/>
                         </a:rPr>
-                        <a:t>Tier 1  |  14.63% / 15.00%</a:t>
+                        <a:t>Tier 1  |  17.50% / 15.00%</a:t>
                       </a:r>
                     </a:p>
                   </a:txBody>
@@ -3690,7 +3690,7 @@
                         <a:rPr sz="900">
                           <a:latin typeface="Segoe UI"/>
                         </a:rPr>
-                        <a:t>Fleet Bound Premium: $29,300.18</a:t>
+                        <a:t>Fleet Bound Premium: $25,888.18</a:t>
                       </a:r>
                     </a:p>
                   </a:txBody>
@@ -3727,7 +3727,7 @@
                         <a:rPr sz="900">
                           <a:latin typeface="Segoe UI"/>
                         </a:rPr>
-                        <a:t>Fleet Book %: 24.8%</a:t>
+                        <a:t>Fleet Book %: 21.9%</a:t>
                       </a:r>
                     </a:p>
                   </a:txBody>
@@ -3766,7 +3766,7 @@
                         <a:rPr sz="900">
                           <a:latin typeface="Segoe UI"/>
                         </a:rPr>
-                        <a:t>Non-Fleet Subs: 39  |  Binds: 5</a:t>
+                        <a:t>Non-Fleet Subs: 38  |  Binds: 6</a:t>
                       </a:r>
                     </a:p>
                   </a:txBody>
@@ -3803,7 +3803,7 @@
                         <a:rPr sz="900">
                           <a:latin typeface="Segoe UI"/>
                         </a:rPr>
-                        <a:t>Non-Fleet Bound Premium: $88,974.36</a:t>
+                        <a:t>Non-Fleet Bound Premium: $92,386.36</a:t>
                       </a:r>
                     </a:p>
                   </a:txBody>
@@ -3840,7 +3840,7 @@
                         <a:rPr sz="900">
                           <a:latin typeface="Segoe UI"/>
                         </a:rPr>
-                        <a:t>Non-Fleet Book %: 75.2%</a:t>
+                        <a:t>Non-Fleet Book %: 78.1%</a:t>
                       </a:r>
                     </a:p>
                   </a:txBody>
@@ -4351,7 +4351,7 @@
                           </a:solidFill>
                           <a:latin typeface="Segoe UI"/>
                         </a:rPr>
-                        <a:t>10</a:t>
+                        <a:t>9</a:t>
                       </a:r>
                     </a:p>
                   </a:txBody>
@@ -4578,7 +4578,7 @@
                         <a:rPr sz="800">
                           <a:latin typeface="Segoe UI"/>
                         </a:rPr>
-                        <a:t>35.5%</a:t>
+                        <a:t>41.9%</a:t>
                       </a:r>
                     </a:p>
                   </a:txBody>
@@ -4857,7 +4857,7 @@
                         <a:rPr sz="800">
                           <a:latin typeface="Segoe UI"/>
                         </a:rPr>
-                        <a:t>11</a:t>
+                        <a:t>13</a:t>
                       </a:r>
                     </a:p>
                   </a:txBody>

--- a/generated/Tier 1 Broker Scorecards/Kavi.Llc_Broker_Scorecard.pptx
+++ b/generated/Tier 1 Broker Scorecards/Kavi.Llc_Broker_Scorecard.pptx
@@ -3394,7 +3394,7 @@
                         <a:rPr sz="900">
                           <a:latin typeface="Segoe UI"/>
                         </a:rPr>
-                        <a:t>Tier 1  |  17.50% / 15.00%</a:t>
+                        <a:t>Tier 1  |  20.00% / 15.00%</a:t>
                       </a:r>
                     </a:p>
                   </a:txBody>
@@ -3690,7 +3690,7 @@
                         <a:rPr sz="900">
                           <a:latin typeface="Segoe UI"/>
                         </a:rPr>
-                        <a:t>Fleet Bound Premium: $25,888.18</a:t>
+                        <a:t>Fleet Bound Premium: $25,495.84</a:t>
                       </a:r>
                     </a:p>
                   </a:txBody>
@@ -3727,7 +3727,7 @@
                         <a:rPr sz="900">
                           <a:latin typeface="Segoe UI"/>
                         </a:rPr>
-                        <a:t>Fleet Book %: 21.9%</a:t>
+                        <a:t>Fleet Book %: 21.6%</a:t>
                       </a:r>
                     </a:p>
                   </a:txBody>
@@ -3766,7 +3766,7 @@
                         <a:rPr sz="900">
                           <a:latin typeface="Segoe UI"/>
                         </a:rPr>
-                        <a:t>Non-Fleet Subs: 38  |  Binds: 6</a:t>
+                        <a:t>Non-Fleet Subs: 38  |  Binds: 7</a:t>
                       </a:r>
                     </a:p>
                   </a:txBody>
@@ -3803,7 +3803,7 @@
                         <a:rPr sz="900">
                           <a:latin typeface="Segoe UI"/>
                         </a:rPr>
-                        <a:t>Non-Fleet Bound Premium: $92,386.36</a:t>
+                        <a:t>Non-Fleet Bound Premium: $92,778.70</a:t>
                       </a:r>
                     </a:p>
                   </a:txBody>
@@ -3840,7 +3840,7 @@
                         <a:rPr sz="900">
                           <a:latin typeface="Segoe UI"/>
                         </a:rPr>
-                        <a:t>Non-Fleet Book %: 78.1%</a:t>
+                        <a:t>Non-Fleet Book %: 78.4%</a:t>
                       </a:r>
                     </a:p>
                   </a:txBody>
@@ -4423,9 +4423,12 @@
                       <a:pPr algn="ctr"/>
                       <a:r>
                         <a:rPr sz="800">
+                          <a:solidFill>
+                            <a:srgbClr val="DC2626"/>
+                          </a:solidFill>
                           <a:latin typeface="Segoe UI"/>
                         </a:rPr>
-                        <a:t/>
+                        <a:t>1</a:t>
                       </a:r>
                     </a:p>
                   </a:txBody>
@@ -4696,9 +4699,12 @@
                       <a:pPr algn="ctr"/>
                       <a:r>
                         <a:rPr sz="800">
+                          <a:solidFill>
+                            <a:srgbClr val="059669"/>
+                          </a:solidFill>
                           <a:latin typeface="Segoe UI"/>
                         </a:rPr>
-                        <a:t/>
+                        <a:t>100.0%</a:t>
                       </a:r>
                     </a:p>
                   </a:txBody>
@@ -4966,9 +4972,12 @@
                       <a:pPr algn="ctr"/>
                       <a:r>
                         <a:rPr sz="800">
+                          <a:solidFill>
+                            <a:srgbClr val="DC2626"/>
+                          </a:solidFill>
                           <a:latin typeface="Segoe UI"/>
                         </a:rPr>
-                        <a:t/>
+                        <a:t>1</a:t>
                       </a:r>
                     </a:p>
                   </a:txBody>

--- a/generated/Tier 1 Broker Scorecards/Kavi.Llc_Broker_Scorecard.pptx
+++ b/generated/Tier 1 Broker Scorecards/Kavi.Llc_Broker_Scorecard.pptx
@@ -3357,7 +3357,7 @@
                         <a:rPr sz="800">
                           <a:latin typeface="Segoe UI"/>
                         </a:rPr>
-                        <a:t>$2,606,761.38 / $1,685,424.49 / $118,274.54</a:t>
+                        <a:t>$2,606,761.38 / $1,685,363.29 / $118,213.34</a:t>
                       </a:r>
                     </a:p>
                   </a:txBody>
@@ -3394,7 +3394,7 @@
                         <a:rPr sz="900">
                           <a:latin typeface="Segoe UI"/>
                         </a:rPr>
-                        <a:t>Tier 1  |  20.00% / 15.00%</a:t>
+                        <a:t>Tier 1  |  17.50% / 15.00%</a:t>
                       </a:r>
                     </a:p>
                   </a:txBody>
@@ -3690,7 +3690,7 @@
                         <a:rPr sz="900">
                           <a:latin typeface="Segoe UI"/>
                         </a:rPr>
-                        <a:t>Fleet Bound Premium: $25,495.84</a:t>
+                        <a:t>Fleet Bound Premium: $28,799.72</a:t>
                       </a:r>
                     </a:p>
                   </a:txBody>
@@ -3727,7 +3727,7 @@
                         <a:rPr sz="900">
                           <a:latin typeface="Segoe UI"/>
                         </a:rPr>
-                        <a:t>Fleet Book %: 21.6%</a:t>
+                        <a:t>Fleet Book %: 24.4%</a:t>
                       </a:r>
                     </a:p>
                   </a:txBody>
@@ -3766,7 +3766,7 @@
                         <a:rPr sz="900">
                           <a:latin typeface="Segoe UI"/>
                         </a:rPr>
-                        <a:t>Non-Fleet Subs: 38  |  Binds: 7</a:t>
+                        <a:t>Non-Fleet Subs: 38  |  Binds: 6</a:t>
                       </a:r>
                     </a:p>
                   </a:txBody>
@@ -3803,7 +3803,7 @@
                         <a:rPr sz="900">
                           <a:latin typeface="Segoe UI"/>
                         </a:rPr>
-                        <a:t>Non-Fleet Bound Premium: $92,778.70</a:t>
+                        <a:t>Non-Fleet Bound Premium: $89,413.62</a:t>
                       </a:r>
                     </a:p>
                   </a:txBody>
@@ -3840,7 +3840,7 @@
                         <a:rPr sz="900">
                           <a:latin typeface="Segoe UI"/>
                         </a:rPr>
-                        <a:t>Non-Fleet Book %: 78.4%</a:t>
+                        <a:t>Non-Fleet Book %: 75.6%</a:t>
                       </a:r>
                     </a:p>
                   </a:txBody>
@@ -4744,7 +4744,7 @@
                         <a:rPr sz="800">
                           <a:latin typeface="Segoe UI"/>
                         </a:rPr>
-                        <a:t>44.8%</a:t>
+                        <a:t>41.4%</a:t>
                       </a:r>
                     </a:p>
                   </a:txBody>
@@ -5014,7 +5014,7 @@
                         <a:rPr sz="800">
                           <a:latin typeface="Segoe UI"/>
                         </a:rPr>
-                        <a:t>13</a:t>
+                        <a:t>12</a:t>
                       </a:r>
                     </a:p>
                   </a:txBody>

--- a/generated/Tier 1 Broker Scorecards/Kavi.Llc_Broker_Scorecard.pptx
+++ b/generated/Tier 1 Broker Scorecards/Kavi.Llc_Broker_Scorecard.pptx
@@ -4581,7 +4581,7 @@
                         <a:rPr sz="800">
                           <a:latin typeface="Segoe UI"/>
                         </a:rPr>
-                        <a:t>41.9%</a:t>
+                        <a:t>35.5%</a:t>
                       </a:r>
                     </a:p>
                   </a:txBody>
@@ -4744,7 +4744,7 @@
                         <a:rPr sz="800">
                           <a:latin typeface="Segoe UI"/>
                         </a:rPr>
-                        <a:t>41.4%</a:t>
+                        <a:t>44.8%</a:t>
                       </a:r>
                     </a:p>
                   </a:txBody>
@@ -4863,7 +4863,7 @@
                         <a:rPr sz="800">
                           <a:latin typeface="Segoe UI"/>
                         </a:rPr>
-                        <a:t>13</a:t>
+                        <a:t>11</a:t>
                       </a:r>
                     </a:p>
                   </a:txBody>
@@ -5014,7 +5014,7 @@
                         <a:rPr sz="800">
                           <a:latin typeface="Segoe UI"/>
                         </a:rPr>
-                        <a:t>12</a:t>
+                        <a:t>13</a:t>
                       </a:r>
                     </a:p>
                   </a:txBody>

--- a/generated/Tier 1 Broker Scorecards/Kavi.Llc_Broker_Scorecard.pptx
+++ b/generated/Tier 1 Broker Scorecards/Kavi.Llc_Broker_Scorecard.pptx
@@ -3357,7 +3357,7 @@
                         <a:rPr sz="800">
                           <a:latin typeface="Segoe UI"/>
                         </a:rPr>
-                        <a:t>$2,606,761.38 / $1,685,363.29 / $118,213.34</a:t>
+                        <a:t>$2,606,761.38 / $1,369,749.82 / $118,213.34</a:t>
                       </a:r>
                     </a:p>
                   </a:txBody>
@@ -3394,7 +3394,7 @@
                         <a:rPr sz="900">
                           <a:latin typeface="Segoe UI"/>
                         </a:rPr>
-                        <a:t>Tier 1  |  17.50% / 15.00%</a:t>
+                        <a:t>Tier 1  |  20.00% / 15.00%</a:t>
                       </a:r>
                     </a:p>
                   </a:txBody>
@@ -3690,7 +3690,7 @@
                         <a:rPr sz="900">
                           <a:latin typeface="Segoe UI"/>
                         </a:rPr>
-                        <a:t>Fleet Bound Premium: $28,799.72</a:t>
+                        <a:t>Fleet Bound Premium: $25,495.20</a:t>
                       </a:r>
                     </a:p>
                   </a:txBody>
@@ -3727,7 +3727,7 @@
                         <a:rPr sz="900">
                           <a:latin typeface="Segoe UI"/>
                         </a:rPr>
-                        <a:t>Fleet Book %: 24.4%</a:t>
+                        <a:t>Fleet Book %: 21.6%</a:t>
                       </a:r>
                     </a:p>
                   </a:txBody>
@@ -3766,7 +3766,7 @@
                         <a:rPr sz="900">
                           <a:latin typeface="Segoe UI"/>
                         </a:rPr>
-                        <a:t>Non-Fleet Subs: 38  |  Binds: 6</a:t>
+                        <a:t>Non-Fleet Subs: 38  |  Binds: 7</a:t>
                       </a:r>
                     </a:p>
                   </a:txBody>
@@ -3803,7 +3803,7 @@
                         <a:rPr sz="900">
                           <a:latin typeface="Segoe UI"/>
                         </a:rPr>
-                        <a:t>Non-Fleet Bound Premium: $89,413.62</a:t>
+                        <a:t>Non-Fleet Bound Premium: $92,718.14</a:t>
                       </a:r>
                     </a:p>
                   </a:txBody>
@@ -3840,7 +3840,7 @@
                         <a:rPr sz="900">
                           <a:latin typeface="Segoe UI"/>
                         </a:rPr>
-                        <a:t>Non-Fleet Book %: 75.6%</a:t>
+                        <a:t>Non-Fleet Book %: 78.4%</a:t>
                       </a:r>
                     </a:p>
                   </a:txBody>
